--- a/sc.pptx
+++ b/sc.pptx
@@ -3836,7 +3836,7 @@
       </p:grpSpPr>
       <p:pic>
         <p:nvPicPr>
-          <p:cNvPr id="2" name="图片 1"/>
+          <p:cNvPr id="3" name="图片 2"/>
           <p:cNvPicPr>
             <a:picLocks noChangeAspect="1"/>
           </p:cNvPicPr>
@@ -3850,8 +3850,8 @@
         </p:blipFill>
         <p:spPr>
           <a:xfrm>
-            <a:off x="0" y="960755"/>
-            <a:ext cx="12192000" cy="4936490"/>
+            <a:off x="0" y="932815"/>
+            <a:ext cx="12192000" cy="4991735"/>
           </a:xfrm>
           <a:prstGeom prst="rect">
             <a:avLst/>
@@ -3888,7 +3888,7 @@
       </p:grpSpPr>
       <p:pic>
         <p:nvPicPr>
-          <p:cNvPr id="2" name="图片 1"/>
+          <p:cNvPr id="3" name="图片 2"/>
           <p:cNvPicPr>
             <a:picLocks noChangeAspect="1"/>
           </p:cNvPicPr>
@@ -3902,8 +3902,8 @@
         </p:blipFill>
         <p:spPr>
           <a:xfrm>
-            <a:off x="0" y="973455"/>
-            <a:ext cx="12192000" cy="4910455"/>
+            <a:off x="0" y="972185"/>
+            <a:ext cx="12192000" cy="4913630"/>
           </a:xfrm>
           <a:prstGeom prst="rect">
             <a:avLst/>

--- a/sc.pptx
+++ b/sc.pptx
@@ -5,10 +5,10 @@
     <p:sldMasterId id="2147483648" r:id="rId1"/>
   </p:sldMasterIdLst>
   <p:notesMasterIdLst>
-    <p:notesMasterId r:id="rId12"/>
+    <p:notesMasterId r:id="rId14"/>
   </p:notesMasterIdLst>
   <p:handoutMasterIdLst>
-    <p:handoutMasterId r:id="rId13"/>
+    <p:handoutMasterId r:id="rId15"/>
   </p:handoutMasterIdLst>
   <p:sldIdLst>
     <p:sldId id="256" r:id="rId3"/>
@@ -20,6 +20,8 @@
     <p:sldId id="266" r:id="rId9"/>
     <p:sldId id="267" r:id="rId10"/>
     <p:sldId id="268" r:id="rId11"/>
+    <p:sldId id="269" r:id="rId12"/>
+    <p:sldId id="270" r:id="rId13"/>
   </p:sldIdLst>
   <p:sldSz cx="12192000" cy="6858000"/>
   <p:notesSz cx="6858000" cy="9144000"/>
@@ -3633,6 +3635,72 @@
 </p:sld>
 </file>
 
+<file path=ppt/slides/slide10.xml><?xml version="1.0" encoding="utf-8"?>
+<p:sld xmlns:a="http://schemas.openxmlformats.org/drawingml/2006/main" xmlns:r="http://schemas.openxmlformats.org/officeDocument/2006/relationships" xmlns:p="http://schemas.openxmlformats.org/presentationml/2006/main">
+  <p:cSld>
+    <p:spTree>
+      <p:nvGrpSpPr>
+        <p:cNvPr id="1" name=""/>
+        <p:cNvGrpSpPr/>
+        <p:nvPr/>
+      </p:nvGrpSpPr>
+      <p:grpSpPr/>
+      <p:pic>
+        <p:nvPicPr>
+          <p:cNvPr id="4" name="图片 3"/>
+          <p:cNvPicPr>
+            <a:picLocks noChangeAspect="1"/>
+          </p:cNvPicPr>
+          <p:nvPr/>
+        </p:nvPicPr>
+        <p:blipFill>
+          <a:blip r:embed="rId1"/>
+          <a:stretch>
+            <a:fillRect/>
+          </a:stretch>
+        </p:blipFill>
+        <p:spPr>
+          <a:xfrm>
+            <a:off x="0" y="1136015"/>
+            <a:ext cx="12192000" cy="4585970"/>
+          </a:xfrm>
+          <a:prstGeom prst="rect">
+            <a:avLst/>
+          </a:prstGeom>
+        </p:spPr>
+      </p:pic>
+    </p:spTree>
+    <p:custDataLst>
+      <p:tags r:id="rId2"/>
+    </p:custDataLst>
+  </p:cSld>
+  <p:clrMapOvr>
+    <a:masterClrMapping/>
+  </p:clrMapOvr>
+</p:sld>
+</file>
+
+<file path=ppt/slides/slide11.xml><?xml version="1.0" encoding="utf-8"?>
+<p:sld xmlns:a="http://schemas.openxmlformats.org/drawingml/2006/main" xmlns:r="http://schemas.openxmlformats.org/officeDocument/2006/relationships" xmlns:p="http://schemas.openxmlformats.org/presentationml/2006/main">
+  <p:cSld>
+    <p:spTree>
+      <p:nvGrpSpPr>
+        <p:cNvPr id="1" name=""/>
+        <p:cNvGrpSpPr/>
+        <p:nvPr/>
+      </p:nvGrpSpPr>
+      <p:grpSpPr/>
+    </p:spTree>
+    <p:custDataLst>
+      <p:tags r:id="rId1"/>
+    </p:custDataLst>
+  </p:cSld>
+  <p:clrMapOvr>
+    <a:masterClrMapping/>
+  </p:clrMapOvr>
+</p:sld>
+</file>
+
 <file path=ppt/slides/slide2.xml><?xml version="1.0" encoding="utf-8"?>
 <p:sld xmlns:a="http://schemas.openxmlformats.org/drawingml/2006/main" xmlns:r="http://schemas.openxmlformats.org/officeDocument/2006/relationships" xmlns:p="http://schemas.openxmlformats.org/presentationml/2006/main">
   <p:cSld>
@@ -3966,9 +4034,33 @@
           <a:chExt cx="0" cy="0"/>
         </a:xfrm>
       </p:grpSpPr>
+      <p:pic>
+        <p:nvPicPr>
+          <p:cNvPr id="2" name="图片 1"/>
+          <p:cNvPicPr>
+            <a:picLocks noChangeAspect="1"/>
+          </p:cNvPicPr>
+          <p:nvPr/>
+        </p:nvPicPr>
+        <p:blipFill>
+          <a:blip r:embed="rId1"/>
+          <a:stretch>
+            <a:fillRect/>
+          </a:stretch>
+        </p:blipFill>
+        <p:spPr>
+          <a:xfrm>
+            <a:off x="0" y="1084580"/>
+            <a:ext cx="12192000" cy="4688840"/>
+          </a:xfrm>
+          <a:prstGeom prst="rect">
+            <a:avLst/>
+          </a:prstGeom>
+        </p:spPr>
+      </p:pic>
     </p:spTree>
     <p:custDataLst>
-      <p:tags r:id="rId1"/>
+      <p:tags r:id="rId2"/>
     </p:custDataLst>
   </p:cSld>
   <p:clrMapOvr>
@@ -4948,6 +5040,22 @@
   <p:tag name="KSO_WM_SLIDE_LAYOUT_CNT" val="1_1"/>
   <p:tag name="KSO_WM_UNIT_SHOW_EDIT_AREA_INDICATION" val="1"/>
   <p:tag name="KSO_WM_TEMPLATE_THUMBS_INDEX" val="1、4、7、12、13、14、15、16、17、18、20、24、25、28、33、36、40、43、44"/>
+</p:tagLst>
+</file>
+
+<file path=ppt/tags/tag72.xml><?xml version="1.0" encoding="utf-8"?>
+<p:tagLst xmlns:p="http://schemas.openxmlformats.org/presentationml/2006/main">
+  <p:tag name="KSO_WM_BEAUTIFY_FLAG" val="#wm#"/>
+  <p:tag name="KSO_WM_TEMPLATE_CATEGORY" val="custom"/>
+  <p:tag name="KSO_WM_TEMPLATE_INDEX" val="20205081"/>
+</p:tagLst>
+</file>
+
+<file path=ppt/tags/tag73.xml><?xml version="1.0" encoding="utf-8"?>
+<p:tagLst xmlns:p="http://schemas.openxmlformats.org/presentationml/2006/main">
+  <p:tag name="KSO_WM_BEAUTIFY_FLAG" val="#wm#"/>
+  <p:tag name="KSO_WM_TEMPLATE_CATEGORY" val="custom"/>
+  <p:tag name="KSO_WM_TEMPLATE_INDEX" val="20205081"/>
 </p:tagLst>
 </file>
 
